--- a/Module 13 Multiple Linear Regression/Multiple Linear Regression Lecturer 2024 .pptx
+++ b/Module 13 Multiple Linear Regression/Multiple Linear Regression Lecturer 2024 .pptx
@@ -175,49 +175,480 @@
 <file path=ppt/changesInfos/changesInfo1.xml><?xml version="1.0" encoding="utf-8"?>
 <pc:chgInfo xmlns:a="http://schemas.openxmlformats.org/drawingml/2006/main" xmlns:r="http://schemas.openxmlformats.org/officeDocument/2006/relationships" xmlns:ac="http://schemas.microsoft.com/office/drawing/2013/main/command" xmlns:pc="http://schemas.microsoft.com/office/powerpoint/2013/main/command">
   <pc:docChgLst>
-    <pc:chgData name="Pablo Esteban Gutiérrez-Fonseca (he/him)" userId="25bdc618-995f-415b-9b28-31563f05eb38" providerId="ADAL" clId="{7CB16E9E-DD1F-44B3-BA75-F0149ED99586}"/>
-    <pc:docChg chg="addSld modSld">
-      <pc:chgData name="Pablo Esteban Gutiérrez-Fonseca (he/him)" userId="25bdc618-995f-415b-9b28-31563f05eb38" providerId="ADAL" clId="{7CB16E9E-DD1F-44B3-BA75-F0149ED99586}" dt="2025-04-16T02:31:12.678" v="13"/>
+    <pc:chgData name="Pablo Esteban Gutiérrez-Fonseca (he/him)" userId="25bdc618-995f-415b-9b28-31563f05eb38" providerId="ADAL" clId="{7D9C72EA-3835-4851-B556-7D2600718D23}"/>
+    <pc:docChg chg="undo custSel addSld delSld modSld">
+      <pc:chgData name="Pablo Esteban Gutiérrez-Fonseca (he/him)" userId="25bdc618-995f-415b-9b28-31563f05eb38" providerId="ADAL" clId="{7D9C72EA-3835-4851-B556-7D2600718D23}" dt="2024-11-19T15:13:46.480" v="342" actId="20577"/>
       <pc:docMkLst>
         <pc:docMk/>
       </pc:docMkLst>
-      <pc:sldChg chg="addSp modSp mod modAnim modNotesTx">
-        <pc:chgData name="Pablo Esteban Gutiérrez-Fonseca (he/him)" userId="25bdc618-995f-415b-9b28-31563f05eb38" providerId="ADAL" clId="{7CB16E9E-DD1F-44B3-BA75-F0149ED99586}" dt="2025-04-16T01:59:36.727" v="6"/>
+      <pc:sldChg chg="addSp modSp mod modAnim">
+        <pc:chgData name="Pablo Esteban Gutiérrez-Fonseca (he/him)" userId="25bdc618-995f-415b-9b28-31563f05eb38" providerId="ADAL" clId="{7D9C72EA-3835-4851-B556-7D2600718D23}" dt="2024-11-19T13:48:08.064" v="215" actId="20577"/>
+        <pc:sldMkLst>
+          <pc:docMk/>
+          <pc:sldMk cId="452531698" sldId="338"/>
+        </pc:sldMkLst>
+      </pc:sldChg>
+      <pc:sldChg chg="addSp delSp modSp new mod">
+        <pc:chgData name="Pablo Esteban Gutiérrez-Fonseca (he/him)" userId="25bdc618-995f-415b-9b28-31563f05eb38" providerId="ADAL" clId="{7D9C72EA-3835-4851-B556-7D2600718D23}" dt="2024-11-18T18:38:52.179" v="181" actId="115"/>
         <pc:sldMkLst>
           <pc:docMk/>
           <pc:sldMk cId="1752915387" sldId="339"/>
         </pc:sldMkLst>
-        <pc:picChg chg="add mod">
-          <ac:chgData name="Pablo Esteban Gutiérrez-Fonseca (he/him)" userId="25bdc618-995f-415b-9b28-31563f05eb38" providerId="ADAL" clId="{7CB16E9E-DD1F-44B3-BA75-F0149ED99586}" dt="2025-04-16T01:59:34.067" v="5" actId="1076"/>
-          <ac:picMkLst>
-            <pc:docMk/>
-            <pc:sldMk cId="1752915387" sldId="339"/>
-            <ac:picMk id="5" creationId="{7EBBE637-A876-2B78-F8C3-A1F5B4766BE5}"/>
-          </ac:picMkLst>
-        </pc:picChg>
-      </pc:sldChg>
-      <pc:sldChg chg="modSp new mod modNotesTx">
-        <pc:chgData name="Pablo Esteban Gutiérrez-Fonseca (he/him)" userId="25bdc618-995f-415b-9b28-31563f05eb38" providerId="ADAL" clId="{7CB16E9E-DD1F-44B3-BA75-F0149ED99586}" dt="2025-04-16T02:31:12.678" v="13"/>
-        <pc:sldMkLst>
-          <pc:docMk/>
-          <pc:sldMk cId="3539073863" sldId="350"/>
-        </pc:sldMkLst>
-        <pc:spChg chg="mod">
-          <ac:chgData name="Pablo Esteban Gutiérrez-Fonseca (he/him)" userId="25bdc618-995f-415b-9b28-31563f05eb38" providerId="ADAL" clId="{7CB16E9E-DD1F-44B3-BA75-F0149ED99586}" dt="2025-04-16T02:31:03.374" v="11" actId="404"/>
-          <ac:spMkLst>
-            <pc:docMk/>
-            <pc:sldMk cId="3539073863" sldId="350"/>
-            <ac:spMk id="2" creationId="{E50E47DE-ADE1-C319-8426-C17AB19AC34B}"/>
-          </ac:spMkLst>
-        </pc:spChg>
-        <pc:spChg chg="mod">
-          <ac:chgData name="Pablo Esteban Gutiérrez-Fonseca (he/him)" userId="25bdc618-995f-415b-9b28-31563f05eb38" providerId="ADAL" clId="{7CB16E9E-DD1F-44B3-BA75-F0149ED99586}" dt="2025-04-16T02:31:07.063" v="12" actId="404"/>
-          <ac:spMkLst>
-            <pc:docMk/>
-            <pc:sldMk cId="3539073863" sldId="350"/>
-            <ac:spMk id="3" creationId="{BFD8C868-648F-17AB-5E0D-148BB3AEB13A}"/>
-          </ac:spMkLst>
-        </pc:spChg>
+      </pc:sldChg>
+      <pc:sldChg chg="modSp add mod">
+        <pc:chgData name="Pablo Esteban Gutiérrez-Fonseca (he/him)" userId="25bdc618-995f-415b-9b28-31563f05eb38" providerId="ADAL" clId="{7D9C72EA-3835-4851-B556-7D2600718D23}" dt="2024-11-18T17:38:28.809" v="46" actId="113"/>
+        <pc:sldMkLst>
+          <pc:docMk/>
+          <pc:sldMk cId="619325884" sldId="340"/>
+        </pc:sldMkLst>
+      </pc:sldChg>
+      <pc:sldChg chg="modSp add mod">
+        <pc:chgData name="Pablo Esteban Gutiérrez-Fonseca (he/him)" userId="25bdc618-995f-415b-9b28-31563f05eb38" providerId="ADAL" clId="{7D9C72EA-3835-4851-B556-7D2600718D23}" dt="2024-11-18T18:24:54.364" v="159" actId="20577"/>
+        <pc:sldMkLst>
+          <pc:docMk/>
+          <pc:sldMk cId="3383735679" sldId="341"/>
+        </pc:sldMkLst>
+      </pc:sldChg>
+      <pc:sldChg chg="addSp modSp new mod">
+        <pc:chgData name="Pablo Esteban Gutiérrez-Fonseca (he/him)" userId="25bdc618-995f-415b-9b28-31563f05eb38" providerId="ADAL" clId="{7D9C72EA-3835-4851-B556-7D2600718D23}" dt="2024-11-18T17:55:14.089" v="129" actId="20577"/>
+        <pc:sldMkLst>
+          <pc:docMk/>
+          <pc:sldMk cId="2093514399" sldId="342"/>
+        </pc:sldMkLst>
+      </pc:sldChg>
+      <pc:sldChg chg="modSp new mod">
+        <pc:chgData name="Pablo Esteban Gutiérrez-Fonseca (he/him)" userId="25bdc618-995f-415b-9b28-31563f05eb38" providerId="ADAL" clId="{7D9C72EA-3835-4851-B556-7D2600718D23}" dt="2024-11-18T18:26:08.284" v="173" actId="20577"/>
+        <pc:sldMkLst>
+          <pc:docMk/>
+          <pc:sldMk cId="661343838" sldId="343"/>
+        </pc:sldMkLst>
+      </pc:sldChg>
+      <pc:sldChg chg="addSp modSp new mod">
+        <pc:chgData name="Pablo Esteban Gutiérrez-Fonseca (he/him)" userId="25bdc618-995f-415b-9b28-31563f05eb38" providerId="ADAL" clId="{7D9C72EA-3835-4851-B556-7D2600718D23}" dt="2024-11-18T19:22:01.992" v="200" actId="108"/>
+        <pc:sldMkLst>
+          <pc:docMk/>
+          <pc:sldMk cId="1501656931" sldId="344"/>
+        </pc:sldMkLst>
+      </pc:sldChg>
+      <pc:sldChg chg="delSp modSp add mod">
+        <pc:chgData name="Pablo Esteban Gutiérrez-Fonseca (he/him)" userId="25bdc618-995f-415b-9b28-31563f05eb38" providerId="ADAL" clId="{7D9C72EA-3835-4851-B556-7D2600718D23}" dt="2024-11-18T19:22:24.776" v="204" actId="108"/>
+        <pc:sldMkLst>
+          <pc:docMk/>
+          <pc:sldMk cId="1244028986" sldId="345"/>
+        </pc:sldMkLst>
+      </pc:sldChg>
+      <pc:sldChg chg="modSp new mod">
+        <pc:chgData name="Pablo Esteban Gutiérrez-Fonseca (he/him)" userId="25bdc618-995f-415b-9b28-31563f05eb38" providerId="ADAL" clId="{7D9C72EA-3835-4851-B556-7D2600718D23}" dt="2024-11-19T15:13:32.257" v="338"/>
+        <pc:sldMkLst>
+          <pc:docMk/>
+          <pc:sldMk cId="1670107377" sldId="346"/>
+        </pc:sldMkLst>
+      </pc:sldChg>
+      <pc:sldChg chg="addSp modSp new mod modAnim">
+        <pc:chgData name="Pablo Esteban Gutiérrez-Fonseca (he/him)" userId="25bdc618-995f-415b-9b28-31563f05eb38" providerId="ADAL" clId="{7D9C72EA-3835-4851-B556-7D2600718D23}" dt="2024-11-19T13:52:05.582" v="233"/>
+        <pc:sldMkLst>
+          <pc:docMk/>
+          <pc:sldMk cId="3823422360" sldId="347"/>
+        </pc:sldMkLst>
+      </pc:sldChg>
+      <pc:sldChg chg="modSp add mod">
+        <pc:chgData name="Pablo Esteban Gutiérrez-Fonseca (he/him)" userId="25bdc618-995f-415b-9b28-31563f05eb38" providerId="ADAL" clId="{7D9C72EA-3835-4851-B556-7D2600718D23}" dt="2024-11-19T13:57:29.500" v="283" actId="113"/>
+        <pc:sldMkLst>
+          <pc:docMk/>
+          <pc:sldMk cId="2410762563" sldId="348"/>
+        </pc:sldMkLst>
+      </pc:sldChg>
+      <pc:sldChg chg="modSp add mod">
+        <pc:chgData name="Pablo Esteban Gutiérrez-Fonseca (he/him)" userId="25bdc618-995f-415b-9b28-31563f05eb38" providerId="ADAL" clId="{7D9C72EA-3835-4851-B556-7D2600718D23}" dt="2024-11-19T15:13:46.480" v="342" actId="20577"/>
+        <pc:sldMkLst>
+          <pc:docMk/>
+          <pc:sldMk cId="1726084656" sldId="349"/>
+        </pc:sldMkLst>
+      </pc:sldChg>
+      <pc:sldChg chg="del">
+        <pc:chgData name="Pablo Esteban Gutiérrez-Fonseca (he/him)" userId="25bdc618-995f-415b-9b28-31563f05eb38" providerId="ADAL" clId="{7D9C72EA-3835-4851-B556-7D2600718D23}" dt="2024-11-18T17:31:59.901" v="0" actId="47"/>
+        <pc:sldMkLst>
+          <pc:docMk/>
+          <pc:sldMk cId="0" sldId="353"/>
+        </pc:sldMkLst>
+      </pc:sldChg>
+      <pc:sldChg chg="del">
+        <pc:chgData name="Pablo Esteban Gutiérrez-Fonseca (he/him)" userId="25bdc618-995f-415b-9b28-31563f05eb38" providerId="ADAL" clId="{7D9C72EA-3835-4851-B556-7D2600718D23}" dt="2024-11-18T17:32:06.377" v="1" actId="47"/>
+        <pc:sldMkLst>
+          <pc:docMk/>
+          <pc:sldMk cId="0" sldId="358"/>
+        </pc:sldMkLst>
+      </pc:sldChg>
+      <pc:sldChg chg="del">
+        <pc:chgData name="Pablo Esteban Gutiérrez-Fonseca (he/him)" userId="25bdc618-995f-415b-9b28-31563f05eb38" providerId="ADAL" clId="{7D9C72EA-3835-4851-B556-7D2600718D23}" dt="2024-11-18T17:32:06.377" v="1" actId="47"/>
+        <pc:sldMkLst>
+          <pc:docMk/>
+          <pc:sldMk cId="3620885315" sldId="397"/>
+        </pc:sldMkLst>
+      </pc:sldChg>
+      <pc:sldChg chg="del">
+        <pc:chgData name="Pablo Esteban Gutiérrez-Fonseca (he/him)" userId="25bdc618-995f-415b-9b28-31563f05eb38" providerId="ADAL" clId="{7D9C72EA-3835-4851-B556-7D2600718D23}" dt="2024-11-18T17:31:59.901" v="0" actId="47"/>
+        <pc:sldMkLst>
+          <pc:docMk/>
+          <pc:sldMk cId="1995688423" sldId="424"/>
+        </pc:sldMkLst>
+      </pc:sldChg>
+      <pc:sldChg chg="del">
+        <pc:chgData name="Pablo Esteban Gutiérrez-Fonseca (he/him)" userId="25bdc618-995f-415b-9b28-31563f05eb38" providerId="ADAL" clId="{7D9C72EA-3835-4851-B556-7D2600718D23}" dt="2024-11-18T17:32:06.377" v="1" actId="47"/>
+        <pc:sldMkLst>
+          <pc:docMk/>
+          <pc:sldMk cId="203113774" sldId="425"/>
+        </pc:sldMkLst>
+      </pc:sldChg>
+      <pc:sldChg chg="del">
+        <pc:chgData name="Pablo Esteban Gutiérrez-Fonseca (he/him)" userId="25bdc618-995f-415b-9b28-31563f05eb38" providerId="ADAL" clId="{7D9C72EA-3835-4851-B556-7D2600718D23}" dt="2024-11-18T17:32:06.377" v="1" actId="47"/>
+        <pc:sldMkLst>
+          <pc:docMk/>
+          <pc:sldMk cId="31230415" sldId="426"/>
+        </pc:sldMkLst>
+      </pc:sldChg>
+      <pc:sldChg chg="del">
+        <pc:chgData name="Pablo Esteban Gutiérrez-Fonseca (he/him)" userId="25bdc618-995f-415b-9b28-31563f05eb38" providerId="ADAL" clId="{7D9C72EA-3835-4851-B556-7D2600718D23}" dt="2024-11-18T17:32:06.377" v="1" actId="47"/>
+        <pc:sldMkLst>
+          <pc:docMk/>
+          <pc:sldMk cId="3836665297" sldId="428"/>
+        </pc:sldMkLst>
+      </pc:sldChg>
+      <pc:sldChg chg="del">
+        <pc:chgData name="Pablo Esteban Gutiérrez-Fonseca (he/him)" userId="25bdc618-995f-415b-9b28-31563f05eb38" providerId="ADAL" clId="{7D9C72EA-3835-4851-B556-7D2600718D23}" dt="2024-11-18T17:31:59.901" v="0" actId="47"/>
+        <pc:sldMkLst>
+          <pc:docMk/>
+          <pc:sldMk cId="3252124337" sldId="429"/>
+        </pc:sldMkLst>
+      </pc:sldChg>
+      <pc:sldChg chg="del">
+        <pc:chgData name="Pablo Esteban Gutiérrez-Fonseca (he/him)" userId="25bdc618-995f-415b-9b28-31563f05eb38" providerId="ADAL" clId="{7D9C72EA-3835-4851-B556-7D2600718D23}" dt="2024-11-18T17:32:06.377" v="1" actId="47"/>
+        <pc:sldMkLst>
+          <pc:docMk/>
+          <pc:sldMk cId="551786521" sldId="430"/>
+        </pc:sldMkLst>
+      </pc:sldChg>
+      <pc:sldChg chg="del">
+        <pc:chgData name="Pablo Esteban Gutiérrez-Fonseca (he/him)" userId="25bdc618-995f-415b-9b28-31563f05eb38" providerId="ADAL" clId="{7D9C72EA-3835-4851-B556-7D2600718D23}" dt="2024-11-18T17:32:06.377" v="1" actId="47"/>
+        <pc:sldMkLst>
+          <pc:docMk/>
+          <pc:sldMk cId="3987978959" sldId="431"/>
+        </pc:sldMkLst>
+      </pc:sldChg>
+      <pc:sldChg chg="del">
+        <pc:chgData name="Pablo Esteban Gutiérrez-Fonseca (he/him)" userId="25bdc618-995f-415b-9b28-31563f05eb38" providerId="ADAL" clId="{7D9C72EA-3835-4851-B556-7D2600718D23}" dt="2024-11-18T17:32:06.377" v="1" actId="47"/>
+        <pc:sldMkLst>
+          <pc:docMk/>
+          <pc:sldMk cId="3604376669" sldId="432"/>
+        </pc:sldMkLst>
+      </pc:sldChg>
+      <pc:sldChg chg="del">
+        <pc:chgData name="Pablo Esteban Gutiérrez-Fonseca (he/him)" userId="25bdc618-995f-415b-9b28-31563f05eb38" providerId="ADAL" clId="{7D9C72EA-3835-4851-B556-7D2600718D23}" dt="2024-11-18T17:32:06.377" v="1" actId="47"/>
+        <pc:sldMkLst>
+          <pc:docMk/>
+          <pc:sldMk cId="3705508344" sldId="433"/>
+        </pc:sldMkLst>
+      </pc:sldChg>
+      <pc:sldChg chg="del">
+        <pc:chgData name="Pablo Esteban Gutiérrez-Fonseca (he/him)" userId="25bdc618-995f-415b-9b28-31563f05eb38" providerId="ADAL" clId="{7D9C72EA-3835-4851-B556-7D2600718D23}" dt="2024-11-18T17:32:06.377" v="1" actId="47"/>
+        <pc:sldMkLst>
+          <pc:docMk/>
+          <pc:sldMk cId="1966377490" sldId="434"/>
+        </pc:sldMkLst>
+      </pc:sldChg>
+      <pc:sldChg chg="del">
+        <pc:chgData name="Pablo Esteban Gutiérrez-Fonseca (he/him)" userId="25bdc618-995f-415b-9b28-31563f05eb38" providerId="ADAL" clId="{7D9C72EA-3835-4851-B556-7D2600718D23}" dt="2024-11-18T17:32:06.377" v="1" actId="47"/>
+        <pc:sldMkLst>
+          <pc:docMk/>
+          <pc:sldMk cId="848024198" sldId="435"/>
+        </pc:sldMkLst>
+      </pc:sldChg>
+      <pc:sldChg chg="del">
+        <pc:chgData name="Pablo Esteban Gutiérrez-Fonseca (he/him)" userId="25bdc618-995f-415b-9b28-31563f05eb38" providerId="ADAL" clId="{7D9C72EA-3835-4851-B556-7D2600718D23}" dt="2024-11-18T17:32:06.377" v="1" actId="47"/>
+        <pc:sldMkLst>
+          <pc:docMk/>
+          <pc:sldMk cId="377430983" sldId="436"/>
+        </pc:sldMkLst>
+      </pc:sldChg>
+      <pc:sldChg chg="del">
+        <pc:chgData name="Pablo Esteban Gutiérrez-Fonseca (he/him)" userId="25bdc618-995f-415b-9b28-31563f05eb38" providerId="ADAL" clId="{7D9C72EA-3835-4851-B556-7D2600718D23}" dt="2024-11-18T17:32:06.377" v="1" actId="47"/>
+        <pc:sldMkLst>
+          <pc:docMk/>
+          <pc:sldMk cId="3554232102" sldId="437"/>
+        </pc:sldMkLst>
+      </pc:sldChg>
+      <pc:sldChg chg="del">
+        <pc:chgData name="Pablo Esteban Gutiérrez-Fonseca (he/him)" userId="25bdc618-995f-415b-9b28-31563f05eb38" providerId="ADAL" clId="{7D9C72EA-3835-4851-B556-7D2600718D23}" dt="2024-11-18T17:32:06.377" v="1" actId="47"/>
+        <pc:sldMkLst>
+          <pc:docMk/>
+          <pc:sldMk cId="1529519286" sldId="438"/>
+        </pc:sldMkLst>
+      </pc:sldChg>
+      <pc:sldChg chg="del">
+        <pc:chgData name="Pablo Esteban Gutiérrez-Fonseca (he/him)" userId="25bdc618-995f-415b-9b28-31563f05eb38" providerId="ADAL" clId="{7D9C72EA-3835-4851-B556-7D2600718D23}" dt="2024-11-18T17:32:06.377" v="1" actId="47"/>
+        <pc:sldMkLst>
+          <pc:docMk/>
+          <pc:sldMk cId="1276764653" sldId="439"/>
+        </pc:sldMkLst>
+      </pc:sldChg>
+      <pc:sldChg chg="del">
+        <pc:chgData name="Pablo Esteban Gutiérrez-Fonseca (he/him)" userId="25bdc618-995f-415b-9b28-31563f05eb38" providerId="ADAL" clId="{7D9C72EA-3835-4851-B556-7D2600718D23}" dt="2024-11-18T17:32:06.377" v="1" actId="47"/>
+        <pc:sldMkLst>
+          <pc:docMk/>
+          <pc:sldMk cId="2710363587" sldId="440"/>
+        </pc:sldMkLst>
+      </pc:sldChg>
+      <pc:sldChg chg="del">
+        <pc:chgData name="Pablo Esteban Gutiérrez-Fonseca (he/him)" userId="25bdc618-995f-415b-9b28-31563f05eb38" providerId="ADAL" clId="{7D9C72EA-3835-4851-B556-7D2600718D23}" dt="2024-11-18T17:32:06.377" v="1" actId="47"/>
+        <pc:sldMkLst>
+          <pc:docMk/>
+          <pc:sldMk cId="3650460827" sldId="442"/>
+        </pc:sldMkLst>
+      </pc:sldChg>
+      <pc:sldChg chg="del">
+        <pc:chgData name="Pablo Esteban Gutiérrez-Fonseca (he/him)" userId="25bdc618-995f-415b-9b28-31563f05eb38" providerId="ADAL" clId="{7D9C72EA-3835-4851-B556-7D2600718D23}" dt="2024-11-18T17:32:06.377" v="1" actId="47"/>
+        <pc:sldMkLst>
+          <pc:docMk/>
+          <pc:sldMk cId="1442753479" sldId="443"/>
+        </pc:sldMkLst>
+      </pc:sldChg>
+      <pc:sldChg chg="del">
+        <pc:chgData name="Pablo Esteban Gutiérrez-Fonseca (he/him)" userId="25bdc618-995f-415b-9b28-31563f05eb38" providerId="ADAL" clId="{7D9C72EA-3835-4851-B556-7D2600718D23}" dt="2024-11-18T17:32:06.377" v="1" actId="47"/>
+        <pc:sldMkLst>
+          <pc:docMk/>
+          <pc:sldMk cId="4293684270" sldId="444"/>
+        </pc:sldMkLst>
+      </pc:sldChg>
+      <pc:sldChg chg="del">
+        <pc:chgData name="Pablo Esteban Gutiérrez-Fonseca (he/him)" userId="25bdc618-995f-415b-9b28-31563f05eb38" providerId="ADAL" clId="{7D9C72EA-3835-4851-B556-7D2600718D23}" dt="2024-11-18T17:32:06.377" v="1" actId="47"/>
+        <pc:sldMkLst>
+          <pc:docMk/>
+          <pc:sldMk cId="706335863" sldId="445"/>
+        </pc:sldMkLst>
+      </pc:sldChg>
+      <pc:sldChg chg="del">
+        <pc:chgData name="Pablo Esteban Gutiérrez-Fonseca (he/him)" userId="25bdc618-995f-415b-9b28-31563f05eb38" providerId="ADAL" clId="{7D9C72EA-3835-4851-B556-7D2600718D23}" dt="2024-11-18T17:32:06.377" v="1" actId="47"/>
+        <pc:sldMkLst>
+          <pc:docMk/>
+          <pc:sldMk cId="2456501208" sldId="447"/>
+        </pc:sldMkLst>
+      </pc:sldChg>
+      <pc:sldChg chg="del">
+        <pc:chgData name="Pablo Esteban Gutiérrez-Fonseca (he/him)" userId="25bdc618-995f-415b-9b28-31563f05eb38" providerId="ADAL" clId="{7D9C72EA-3835-4851-B556-7D2600718D23}" dt="2024-11-18T17:32:06.377" v="1" actId="47"/>
+        <pc:sldMkLst>
+          <pc:docMk/>
+          <pc:sldMk cId="433020280" sldId="448"/>
+        </pc:sldMkLst>
+      </pc:sldChg>
+      <pc:sldChg chg="del">
+        <pc:chgData name="Pablo Esteban Gutiérrez-Fonseca (he/him)" userId="25bdc618-995f-415b-9b28-31563f05eb38" providerId="ADAL" clId="{7D9C72EA-3835-4851-B556-7D2600718D23}" dt="2024-11-18T17:32:06.377" v="1" actId="47"/>
+        <pc:sldMkLst>
+          <pc:docMk/>
+          <pc:sldMk cId="1529699048" sldId="449"/>
+        </pc:sldMkLst>
+      </pc:sldChg>
+      <pc:sldChg chg="del">
+        <pc:chgData name="Pablo Esteban Gutiérrez-Fonseca (he/him)" userId="25bdc618-995f-415b-9b28-31563f05eb38" providerId="ADAL" clId="{7D9C72EA-3835-4851-B556-7D2600718D23}" dt="2024-11-18T17:32:06.377" v="1" actId="47"/>
+        <pc:sldMkLst>
+          <pc:docMk/>
+          <pc:sldMk cId="3028745146" sldId="450"/>
+        </pc:sldMkLst>
+      </pc:sldChg>
+      <pc:sldChg chg="del">
+        <pc:chgData name="Pablo Esteban Gutiérrez-Fonseca (he/him)" userId="25bdc618-995f-415b-9b28-31563f05eb38" providerId="ADAL" clId="{7D9C72EA-3835-4851-B556-7D2600718D23}" dt="2024-11-18T17:32:06.377" v="1" actId="47"/>
+        <pc:sldMkLst>
+          <pc:docMk/>
+          <pc:sldMk cId="3409393423" sldId="451"/>
+        </pc:sldMkLst>
+      </pc:sldChg>
+      <pc:sldChg chg="del">
+        <pc:chgData name="Pablo Esteban Gutiérrez-Fonseca (he/him)" userId="25bdc618-995f-415b-9b28-31563f05eb38" providerId="ADAL" clId="{7D9C72EA-3835-4851-B556-7D2600718D23}" dt="2024-11-18T17:32:06.377" v="1" actId="47"/>
+        <pc:sldMkLst>
+          <pc:docMk/>
+          <pc:sldMk cId="2044860063" sldId="452"/>
+        </pc:sldMkLst>
+      </pc:sldChg>
+      <pc:sldChg chg="del">
+        <pc:chgData name="Pablo Esteban Gutiérrez-Fonseca (he/him)" userId="25bdc618-995f-415b-9b28-31563f05eb38" providerId="ADAL" clId="{7D9C72EA-3835-4851-B556-7D2600718D23}" dt="2024-11-18T17:32:06.377" v="1" actId="47"/>
+        <pc:sldMkLst>
+          <pc:docMk/>
+          <pc:sldMk cId="1599736166" sldId="453"/>
+        </pc:sldMkLst>
+      </pc:sldChg>
+      <pc:sldChg chg="del">
+        <pc:chgData name="Pablo Esteban Gutiérrez-Fonseca (he/him)" userId="25bdc618-995f-415b-9b28-31563f05eb38" providerId="ADAL" clId="{7D9C72EA-3835-4851-B556-7D2600718D23}" dt="2024-11-18T17:32:06.377" v="1" actId="47"/>
+        <pc:sldMkLst>
+          <pc:docMk/>
+          <pc:sldMk cId="2651903870" sldId="454"/>
+        </pc:sldMkLst>
+      </pc:sldChg>
+      <pc:sldChg chg="del">
+        <pc:chgData name="Pablo Esteban Gutiérrez-Fonseca (he/him)" userId="25bdc618-995f-415b-9b28-31563f05eb38" providerId="ADAL" clId="{7D9C72EA-3835-4851-B556-7D2600718D23}" dt="2024-11-18T17:32:06.377" v="1" actId="47"/>
+        <pc:sldMkLst>
+          <pc:docMk/>
+          <pc:sldMk cId="3010514874" sldId="456"/>
+        </pc:sldMkLst>
+      </pc:sldChg>
+      <pc:sldChg chg="del">
+        <pc:chgData name="Pablo Esteban Gutiérrez-Fonseca (he/him)" userId="25bdc618-995f-415b-9b28-31563f05eb38" providerId="ADAL" clId="{7D9C72EA-3835-4851-B556-7D2600718D23}" dt="2024-11-18T17:32:06.377" v="1" actId="47"/>
+        <pc:sldMkLst>
+          <pc:docMk/>
+          <pc:sldMk cId="3854649333" sldId="457"/>
+        </pc:sldMkLst>
+      </pc:sldChg>
+      <pc:sldChg chg="del">
+        <pc:chgData name="Pablo Esteban Gutiérrez-Fonseca (he/him)" userId="25bdc618-995f-415b-9b28-31563f05eb38" providerId="ADAL" clId="{7D9C72EA-3835-4851-B556-7D2600718D23}" dt="2024-11-18T17:32:06.377" v="1" actId="47"/>
+        <pc:sldMkLst>
+          <pc:docMk/>
+          <pc:sldMk cId="3794688295" sldId="458"/>
+        </pc:sldMkLst>
+      </pc:sldChg>
+      <pc:sldChg chg="del">
+        <pc:chgData name="Pablo Esteban Gutiérrez-Fonseca (he/him)" userId="25bdc618-995f-415b-9b28-31563f05eb38" providerId="ADAL" clId="{7D9C72EA-3835-4851-B556-7D2600718D23}" dt="2024-11-18T17:32:06.377" v="1" actId="47"/>
+        <pc:sldMkLst>
+          <pc:docMk/>
+          <pc:sldMk cId="831549164" sldId="459"/>
+        </pc:sldMkLst>
+      </pc:sldChg>
+      <pc:sldChg chg="del">
+        <pc:chgData name="Pablo Esteban Gutiérrez-Fonseca (he/him)" userId="25bdc618-995f-415b-9b28-31563f05eb38" providerId="ADAL" clId="{7D9C72EA-3835-4851-B556-7D2600718D23}" dt="2024-11-18T17:32:06.377" v="1" actId="47"/>
+        <pc:sldMkLst>
+          <pc:docMk/>
+          <pc:sldMk cId="3026364795" sldId="460"/>
+        </pc:sldMkLst>
+      </pc:sldChg>
+      <pc:sldChg chg="del">
+        <pc:chgData name="Pablo Esteban Gutiérrez-Fonseca (he/him)" userId="25bdc618-995f-415b-9b28-31563f05eb38" providerId="ADAL" clId="{7D9C72EA-3835-4851-B556-7D2600718D23}" dt="2024-11-18T17:32:06.377" v="1" actId="47"/>
+        <pc:sldMkLst>
+          <pc:docMk/>
+          <pc:sldMk cId="2790315627" sldId="461"/>
+        </pc:sldMkLst>
+      </pc:sldChg>
+      <pc:sldChg chg="del">
+        <pc:chgData name="Pablo Esteban Gutiérrez-Fonseca (he/him)" userId="25bdc618-995f-415b-9b28-31563f05eb38" providerId="ADAL" clId="{7D9C72EA-3835-4851-B556-7D2600718D23}" dt="2024-11-18T17:32:06.377" v="1" actId="47"/>
+        <pc:sldMkLst>
+          <pc:docMk/>
+          <pc:sldMk cId="4283467524" sldId="462"/>
+        </pc:sldMkLst>
+      </pc:sldChg>
+      <pc:sldChg chg="del">
+        <pc:chgData name="Pablo Esteban Gutiérrez-Fonseca (he/him)" userId="25bdc618-995f-415b-9b28-31563f05eb38" providerId="ADAL" clId="{7D9C72EA-3835-4851-B556-7D2600718D23}" dt="2024-11-18T17:32:06.377" v="1" actId="47"/>
+        <pc:sldMkLst>
+          <pc:docMk/>
+          <pc:sldMk cId="2865823119" sldId="463"/>
+        </pc:sldMkLst>
+      </pc:sldChg>
+      <pc:sldChg chg="del">
+        <pc:chgData name="Pablo Esteban Gutiérrez-Fonseca (he/him)" userId="25bdc618-995f-415b-9b28-31563f05eb38" providerId="ADAL" clId="{7D9C72EA-3835-4851-B556-7D2600718D23}" dt="2024-11-18T17:32:06.377" v="1" actId="47"/>
+        <pc:sldMkLst>
+          <pc:docMk/>
+          <pc:sldMk cId="1105824289" sldId="464"/>
+        </pc:sldMkLst>
+      </pc:sldChg>
+      <pc:sldChg chg="del">
+        <pc:chgData name="Pablo Esteban Gutiérrez-Fonseca (he/him)" userId="25bdc618-995f-415b-9b28-31563f05eb38" providerId="ADAL" clId="{7D9C72EA-3835-4851-B556-7D2600718D23}" dt="2024-11-18T17:32:06.377" v="1" actId="47"/>
+        <pc:sldMkLst>
+          <pc:docMk/>
+          <pc:sldMk cId="3387775123" sldId="465"/>
+        </pc:sldMkLst>
+      </pc:sldChg>
+      <pc:sldChg chg="del">
+        <pc:chgData name="Pablo Esteban Gutiérrez-Fonseca (he/him)" userId="25bdc618-995f-415b-9b28-31563f05eb38" providerId="ADAL" clId="{7D9C72EA-3835-4851-B556-7D2600718D23}" dt="2024-11-18T17:32:06.377" v="1" actId="47"/>
+        <pc:sldMkLst>
+          <pc:docMk/>
+          <pc:sldMk cId="3963161799" sldId="466"/>
+        </pc:sldMkLst>
+      </pc:sldChg>
+      <pc:sldChg chg="del">
+        <pc:chgData name="Pablo Esteban Gutiérrez-Fonseca (he/him)" userId="25bdc618-995f-415b-9b28-31563f05eb38" providerId="ADAL" clId="{7D9C72EA-3835-4851-B556-7D2600718D23}" dt="2024-11-18T17:32:06.377" v="1" actId="47"/>
+        <pc:sldMkLst>
+          <pc:docMk/>
+          <pc:sldMk cId="1477401131" sldId="467"/>
+        </pc:sldMkLst>
+      </pc:sldChg>
+      <pc:sldChg chg="del">
+        <pc:chgData name="Pablo Esteban Gutiérrez-Fonseca (he/him)" userId="25bdc618-995f-415b-9b28-31563f05eb38" providerId="ADAL" clId="{7D9C72EA-3835-4851-B556-7D2600718D23}" dt="2024-11-18T17:32:06.377" v="1" actId="47"/>
+        <pc:sldMkLst>
+          <pc:docMk/>
+          <pc:sldMk cId="4086430647" sldId="468"/>
+        </pc:sldMkLst>
+      </pc:sldChg>
+      <pc:sldChg chg="del">
+        <pc:chgData name="Pablo Esteban Gutiérrez-Fonseca (he/him)" userId="25bdc618-995f-415b-9b28-31563f05eb38" providerId="ADAL" clId="{7D9C72EA-3835-4851-B556-7D2600718D23}" dt="2024-11-18T17:32:06.377" v="1" actId="47"/>
+        <pc:sldMkLst>
+          <pc:docMk/>
+          <pc:sldMk cId="1646979674" sldId="469"/>
+        </pc:sldMkLst>
+      </pc:sldChg>
+      <pc:sldChg chg="del">
+        <pc:chgData name="Pablo Esteban Gutiérrez-Fonseca (he/him)" userId="25bdc618-995f-415b-9b28-31563f05eb38" providerId="ADAL" clId="{7D9C72EA-3835-4851-B556-7D2600718D23}" dt="2024-11-18T17:32:06.377" v="1" actId="47"/>
+        <pc:sldMkLst>
+          <pc:docMk/>
+          <pc:sldMk cId="2399413619" sldId="470"/>
+        </pc:sldMkLst>
+      </pc:sldChg>
+      <pc:sldChg chg="del">
+        <pc:chgData name="Pablo Esteban Gutiérrez-Fonseca (he/him)" userId="25bdc618-995f-415b-9b28-31563f05eb38" providerId="ADAL" clId="{7D9C72EA-3835-4851-B556-7D2600718D23}" dt="2024-11-18T17:32:06.377" v="1" actId="47"/>
+        <pc:sldMkLst>
+          <pc:docMk/>
+          <pc:sldMk cId="3713444159" sldId="471"/>
+        </pc:sldMkLst>
+      </pc:sldChg>
+      <pc:sldChg chg="del">
+        <pc:chgData name="Pablo Esteban Gutiérrez-Fonseca (he/him)" userId="25bdc618-995f-415b-9b28-31563f05eb38" providerId="ADAL" clId="{7D9C72EA-3835-4851-B556-7D2600718D23}" dt="2024-11-18T17:32:06.377" v="1" actId="47"/>
+        <pc:sldMkLst>
+          <pc:docMk/>
+          <pc:sldMk cId="2764097611" sldId="472"/>
+        </pc:sldMkLst>
+      </pc:sldChg>
+      <pc:sldChg chg="del">
+        <pc:chgData name="Pablo Esteban Gutiérrez-Fonseca (he/him)" userId="25bdc618-995f-415b-9b28-31563f05eb38" providerId="ADAL" clId="{7D9C72EA-3835-4851-B556-7D2600718D23}" dt="2024-11-18T17:32:06.377" v="1" actId="47"/>
+        <pc:sldMkLst>
+          <pc:docMk/>
+          <pc:sldMk cId="312242398" sldId="473"/>
+        </pc:sldMkLst>
+      </pc:sldChg>
+      <pc:sldChg chg="del">
+        <pc:chgData name="Pablo Esteban Gutiérrez-Fonseca (he/him)" userId="25bdc618-995f-415b-9b28-31563f05eb38" providerId="ADAL" clId="{7D9C72EA-3835-4851-B556-7D2600718D23}" dt="2024-11-18T17:32:06.377" v="1" actId="47"/>
+        <pc:sldMkLst>
+          <pc:docMk/>
+          <pc:sldMk cId="4187936776" sldId="474"/>
+        </pc:sldMkLst>
+      </pc:sldChg>
+      <pc:sldChg chg="del">
+        <pc:chgData name="Pablo Esteban Gutiérrez-Fonseca (he/him)" userId="25bdc618-995f-415b-9b28-31563f05eb38" providerId="ADAL" clId="{7D9C72EA-3835-4851-B556-7D2600718D23}" dt="2024-11-18T17:32:06.377" v="1" actId="47"/>
+        <pc:sldMkLst>
+          <pc:docMk/>
+          <pc:sldMk cId="274915159" sldId="475"/>
+        </pc:sldMkLst>
+      </pc:sldChg>
+      <pc:sldChg chg="del">
+        <pc:chgData name="Pablo Esteban Gutiérrez-Fonseca (he/him)" userId="25bdc618-995f-415b-9b28-31563f05eb38" providerId="ADAL" clId="{7D9C72EA-3835-4851-B556-7D2600718D23}" dt="2024-11-18T17:32:06.377" v="1" actId="47"/>
+        <pc:sldMkLst>
+          <pc:docMk/>
+          <pc:sldMk cId="2192977316" sldId="476"/>
+        </pc:sldMkLst>
+      </pc:sldChg>
+      <pc:sldChg chg="del">
+        <pc:chgData name="Pablo Esteban Gutiérrez-Fonseca (he/him)" userId="25bdc618-995f-415b-9b28-31563f05eb38" providerId="ADAL" clId="{7D9C72EA-3835-4851-B556-7D2600718D23}" dt="2024-11-18T17:32:06.377" v="1" actId="47"/>
+        <pc:sldMkLst>
+          <pc:docMk/>
+          <pc:sldMk cId="3298240729" sldId="477"/>
+        </pc:sldMkLst>
+      </pc:sldChg>
+      <pc:sldChg chg="del">
+        <pc:chgData name="Pablo Esteban Gutiérrez-Fonseca (he/him)" userId="25bdc618-995f-415b-9b28-31563f05eb38" providerId="ADAL" clId="{7D9C72EA-3835-4851-B556-7D2600718D23}" dt="2024-11-18T17:32:06.377" v="1" actId="47"/>
+        <pc:sldMkLst>
+          <pc:docMk/>
+          <pc:sldMk cId="4068662439" sldId="478"/>
+        </pc:sldMkLst>
+      </pc:sldChg>
+      <pc:sldChg chg="del">
+        <pc:chgData name="Pablo Esteban Gutiérrez-Fonseca (he/him)" userId="25bdc618-995f-415b-9b28-31563f05eb38" providerId="ADAL" clId="{7D9C72EA-3835-4851-B556-7D2600718D23}" dt="2024-11-18T17:32:06.377" v="1" actId="47"/>
+        <pc:sldMkLst>
+          <pc:docMk/>
+          <pc:sldMk cId="1947247746" sldId="479"/>
+        </pc:sldMkLst>
       </pc:sldChg>
     </pc:docChg>
   </pc:docChgLst>
@@ -1070,6 +1501,84 @@
     </pc:docChg>
   </pc:docChgLst>
   <pc:docChgLst>
+    <pc:chgData name="Pablo Esteban Gutiérrez-Fonseca (he/him)" userId="25bdc618-995f-415b-9b28-31563f05eb38" providerId="ADAL" clId="{9BA6E492-592D-420C-B713-8131141F9A67}"/>
+    <pc:docChg chg="custSel modSld">
+      <pc:chgData name="Pablo Esteban Gutiérrez-Fonseca (he/him)" userId="25bdc618-995f-415b-9b28-31563f05eb38" providerId="ADAL" clId="{9BA6E492-592D-420C-B713-8131141F9A67}" dt="2025-04-16T18:50:59.989" v="26" actId="6549"/>
+      <pc:docMkLst>
+        <pc:docMk/>
+      </pc:docMkLst>
+      <pc:sldChg chg="mod modShow">
+        <pc:chgData name="Pablo Esteban Gutiérrez-Fonseca (he/him)" userId="25bdc618-995f-415b-9b28-31563f05eb38" providerId="ADAL" clId="{9BA6E492-592D-420C-B713-8131141F9A67}" dt="2025-04-16T16:17:00.285" v="0" actId="729"/>
+        <pc:sldMkLst>
+          <pc:docMk/>
+          <pc:sldMk cId="3383735679" sldId="341"/>
+        </pc:sldMkLst>
+      </pc:sldChg>
+      <pc:sldChg chg="modSp mod">
+        <pc:chgData name="Pablo Esteban Gutiérrez-Fonseca (he/him)" userId="25bdc618-995f-415b-9b28-31563f05eb38" providerId="ADAL" clId="{9BA6E492-592D-420C-B713-8131141F9A67}" dt="2025-04-16T18:50:59.989" v="26" actId="6549"/>
+        <pc:sldMkLst>
+          <pc:docMk/>
+          <pc:sldMk cId="1244028986" sldId="345"/>
+        </pc:sldMkLst>
+        <pc:spChg chg="mod">
+          <ac:chgData name="Pablo Esteban Gutiérrez-Fonseca (he/him)" userId="25bdc618-995f-415b-9b28-31563f05eb38" providerId="ADAL" clId="{9BA6E492-592D-420C-B713-8131141F9A67}" dt="2025-04-16T18:50:59.989" v="26" actId="6549"/>
+          <ac:spMkLst>
+            <pc:docMk/>
+            <pc:sldMk cId="1244028986" sldId="345"/>
+            <ac:spMk id="3" creationId="{60DB5D6A-357F-0B7F-395F-9407964D89D2}"/>
+          </ac:spMkLst>
+        </pc:spChg>
+      </pc:sldChg>
+    </pc:docChg>
+  </pc:docChgLst>
+  <pc:docChgLst>
+    <pc:chgData name="Pablo Esteban Gutiérrez-Fonseca (he/him)" userId="25bdc618-995f-415b-9b28-31563f05eb38" providerId="ADAL" clId="{7CB16E9E-DD1F-44B3-BA75-F0149ED99586}"/>
+    <pc:docChg chg="addSld modSld">
+      <pc:chgData name="Pablo Esteban Gutiérrez-Fonseca (he/him)" userId="25bdc618-995f-415b-9b28-31563f05eb38" providerId="ADAL" clId="{7CB16E9E-DD1F-44B3-BA75-F0149ED99586}" dt="2025-04-16T02:31:12.678" v="13"/>
+      <pc:docMkLst>
+        <pc:docMk/>
+      </pc:docMkLst>
+      <pc:sldChg chg="addSp modSp mod modAnim modNotesTx">
+        <pc:chgData name="Pablo Esteban Gutiérrez-Fonseca (he/him)" userId="25bdc618-995f-415b-9b28-31563f05eb38" providerId="ADAL" clId="{7CB16E9E-DD1F-44B3-BA75-F0149ED99586}" dt="2025-04-16T01:59:36.727" v="6"/>
+        <pc:sldMkLst>
+          <pc:docMk/>
+          <pc:sldMk cId="1752915387" sldId="339"/>
+        </pc:sldMkLst>
+        <pc:picChg chg="add mod">
+          <ac:chgData name="Pablo Esteban Gutiérrez-Fonseca (he/him)" userId="25bdc618-995f-415b-9b28-31563f05eb38" providerId="ADAL" clId="{7CB16E9E-DD1F-44B3-BA75-F0149ED99586}" dt="2025-04-16T01:59:34.067" v="5" actId="1076"/>
+          <ac:picMkLst>
+            <pc:docMk/>
+            <pc:sldMk cId="1752915387" sldId="339"/>
+            <ac:picMk id="5" creationId="{7EBBE637-A876-2B78-F8C3-A1F5B4766BE5}"/>
+          </ac:picMkLst>
+        </pc:picChg>
+      </pc:sldChg>
+      <pc:sldChg chg="modSp new mod modNotesTx">
+        <pc:chgData name="Pablo Esteban Gutiérrez-Fonseca (he/him)" userId="25bdc618-995f-415b-9b28-31563f05eb38" providerId="ADAL" clId="{7CB16E9E-DD1F-44B3-BA75-F0149ED99586}" dt="2025-04-16T02:31:12.678" v="13"/>
+        <pc:sldMkLst>
+          <pc:docMk/>
+          <pc:sldMk cId="3539073863" sldId="350"/>
+        </pc:sldMkLst>
+        <pc:spChg chg="mod">
+          <ac:chgData name="Pablo Esteban Gutiérrez-Fonseca (he/him)" userId="25bdc618-995f-415b-9b28-31563f05eb38" providerId="ADAL" clId="{7CB16E9E-DD1F-44B3-BA75-F0149ED99586}" dt="2025-04-16T02:31:03.374" v="11" actId="404"/>
+          <ac:spMkLst>
+            <pc:docMk/>
+            <pc:sldMk cId="3539073863" sldId="350"/>
+            <ac:spMk id="2" creationId="{E50E47DE-ADE1-C319-8426-C17AB19AC34B}"/>
+          </ac:spMkLst>
+        </pc:spChg>
+        <pc:spChg chg="mod">
+          <ac:chgData name="Pablo Esteban Gutiérrez-Fonseca (he/him)" userId="25bdc618-995f-415b-9b28-31563f05eb38" providerId="ADAL" clId="{7CB16E9E-DD1F-44B3-BA75-F0149ED99586}" dt="2025-04-16T02:31:07.063" v="12" actId="404"/>
+          <ac:spMkLst>
+            <pc:docMk/>
+            <pc:sldMk cId="3539073863" sldId="350"/>
+            <ac:spMk id="3" creationId="{BFD8C868-648F-17AB-5E0D-148BB3AEB13A}"/>
+          </ac:spMkLst>
+        </pc:spChg>
+      </pc:sldChg>
+    </pc:docChg>
+  </pc:docChgLst>
+  <pc:docChgLst>
     <pc:chgData name="Pablo Esteban Gutiérrez-Fonseca (he/him)" userId="25bdc618-995f-415b-9b28-31563f05eb38" providerId="ADAL" clId="{A216CF9F-B214-4DDD-AEAB-462713E5FA62}"/>
     <pc:docChg chg="undo redo custSel addSld delSld modSld sldOrd modMainMaster modNotesMaster">
       <pc:chgData name="Pablo Esteban Gutiérrez-Fonseca (he/him)" userId="25bdc618-995f-415b-9b28-31563f05eb38" providerId="ADAL" clId="{A216CF9F-B214-4DDD-AEAB-462713E5FA62}" dt="2024-04-17T14:28:57.228" v="2163"/>
@@ -1786,484 +2295,6 @@
       </pc:sldMasterChg>
     </pc:docChg>
   </pc:docChgLst>
-  <pc:docChgLst>
-    <pc:chgData name="Pablo Esteban Gutiérrez-Fonseca (he/him)" userId="25bdc618-995f-415b-9b28-31563f05eb38" providerId="ADAL" clId="{7D9C72EA-3835-4851-B556-7D2600718D23}"/>
-    <pc:docChg chg="undo custSel addSld delSld modSld">
-      <pc:chgData name="Pablo Esteban Gutiérrez-Fonseca (he/him)" userId="25bdc618-995f-415b-9b28-31563f05eb38" providerId="ADAL" clId="{7D9C72EA-3835-4851-B556-7D2600718D23}" dt="2024-11-19T15:13:46.480" v="342" actId="20577"/>
-      <pc:docMkLst>
-        <pc:docMk/>
-      </pc:docMkLst>
-      <pc:sldChg chg="addSp modSp mod modAnim">
-        <pc:chgData name="Pablo Esteban Gutiérrez-Fonseca (he/him)" userId="25bdc618-995f-415b-9b28-31563f05eb38" providerId="ADAL" clId="{7D9C72EA-3835-4851-B556-7D2600718D23}" dt="2024-11-19T13:48:08.064" v="215" actId="20577"/>
-        <pc:sldMkLst>
-          <pc:docMk/>
-          <pc:sldMk cId="452531698" sldId="338"/>
-        </pc:sldMkLst>
-      </pc:sldChg>
-      <pc:sldChg chg="addSp delSp modSp new mod">
-        <pc:chgData name="Pablo Esteban Gutiérrez-Fonseca (he/him)" userId="25bdc618-995f-415b-9b28-31563f05eb38" providerId="ADAL" clId="{7D9C72EA-3835-4851-B556-7D2600718D23}" dt="2024-11-18T18:38:52.179" v="181" actId="115"/>
-        <pc:sldMkLst>
-          <pc:docMk/>
-          <pc:sldMk cId="1752915387" sldId="339"/>
-        </pc:sldMkLst>
-      </pc:sldChg>
-      <pc:sldChg chg="modSp add mod">
-        <pc:chgData name="Pablo Esteban Gutiérrez-Fonseca (he/him)" userId="25bdc618-995f-415b-9b28-31563f05eb38" providerId="ADAL" clId="{7D9C72EA-3835-4851-B556-7D2600718D23}" dt="2024-11-18T17:38:28.809" v="46" actId="113"/>
-        <pc:sldMkLst>
-          <pc:docMk/>
-          <pc:sldMk cId="619325884" sldId="340"/>
-        </pc:sldMkLst>
-      </pc:sldChg>
-      <pc:sldChg chg="modSp add mod">
-        <pc:chgData name="Pablo Esteban Gutiérrez-Fonseca (he/him)" userId="25bdc618-995f-415b-9b28-31563f05eb38" providerId="ADAL" clId="{7D9C72EA-3835-4851-B556-7D2600718D23}" dt="2024-11-18T18:24:54.364" v="159" actId="20577"/>
-        <pc:sldMkLst>
-          <pc:docMk/>
-          <pc:sldMk cId="3383735679" sldId="341"/>
-        </pc:sldMkLst>
-      </pc:sldChg>
-      <pc:sldChg chg="addSp modSp new mod">
-        <pc:chgData name="Pablo Esteban Gutiérrez-Fonseca (he/him)" userId="25bdc618-995f-415b-9b28-31563f05eb38" providerId="ADAL" clId="{7D9C72EA-3835-4851-B556-7D2600718D23}" dt="2024-11-18T17:55:14.089" v="129" actId="20577"/>
-        <pc:sldMkLst>
-          <pc:docMk/>
-          <pc:sldMk cId="2093514399" sldId="342"/>
-        </pc:sldMkLst>
-      </pc:sldChg>
-      <pc:sldChg chg="modSp new mod">
-        <pc:chgData name="Pablo Esteban Gutiérrez-Fonseca (he/him)" userId="25bdc618-995f-415b-9b28-31563f05eb38" providerId="ADAL" clId="{7D9C72EA-3835-4851-B556-7D2600718D23}" dt="2024-11-18T18:26:08.284" v="173" actId="20577"/>
-        <pc:sldMkLst>
-          <pc:docMk/>
-          <pc:sldMk cId="661343838" sldId="343"/>
-        </pc:sldMkLst>
-      </pc:sldChg>
-      <pc:sldChg chg="addSp modSp new mod">
-        <pc:chgData name="Pablo Esteban Gutiérrez-Fonseca (he/him)" userId="25bdc618-995f-415b-9b28-31563f05eb38" providerId="ADAL" clId="{7D9C72EA-3835-4851-B556-7D2600718D23}" dt="2024-11-18T19:22:01.992" v="200" actId="108"/>
-        <pc:sldMkLst>
-          <pc:docMk/>
-          <pc:sldMk cId="1501656931" sldId="344"/>
-        </pc:sldMkLst>
-      </pc:sldChg>
-      <pc:sldChg chg="delSp modSp add mod">
-        <pc:chgData name="Pablo Esteban Gutiérrez-Fonseca (he/him)" userId="25bdc618-995f-415b-9b28-31563f05eb38" providerId="ADAL" clId="{7D9C72EA-3835-4851-B556-7D2600718D23}" dt="2024-11-18T19:22:24.776" v="204" actId="108"/>
-        <pc:sldMkLst>
-          <pc:docMk/>
-          <pc:sldMk cId="1244028986" sldId="345"/>
-        </pc:sldMkLst>
-      </pc:sldChg>
-      <pc:sldChg chg="modSp new mod">
-        <pc:chgData name="Pablo Esteban Gutiérrez-Fonseca (he/him)" userId="25bdc618-995f-415b-9b28-31563f05eb38" providerId="ADAL" clId="{7D9C72EA-3835-4851-B556-7D2600718D23}" dt="2024-11-19T15:13:32.257" v="338"/>
-        <pc:sldMkLst>
-          <pc:docMk/>
-          <pc:sldMk cId="1670107377" sldId="346"/>
-        </pc:sldMkLst>
-      </pc:sldChg>
-      <pc:sldChg chg="addSp modSp new mod modAnim">
-        <pc:chgData name="Pablo Esteban Gutiérrez-Fonseca (he/him)" userId="25bdc618-995f-415b-9b28-31563f05eb38" providerId="ADAL" clId="{7D9C72EA-3835-4851-B556-7D2600718D23}" dt="2024-11-19T13:52:05.582" v="233"/>
-        <pc:sldMkLst>
-          <pc:docMk/>
-          <pc:sldMk cId="3823422360" sldId="347"/>
-        </pc:sldMkLst>
-      </pc:sldChg>
-      <pc:sldChg chg="modSp add mod">
-        <pc:chgData name="Pablo Esteban Gutiérrez-Fonseca (he/him)" userId="25bdc618-995f-415b-9b28-31563f05eb38" providerId="ADAL" clId="{7D9C72EA-3835-4851-B556-7D2600718D23}" dt="2024-11-19T13:57:29.500" v="283" actId="113"/>
-        <pc:sldMkLst>
-          <pc:docMk/>
-          <pc:sldMk cId="2410762563" sldId="348"/>
-        </pc:sldMkLst>
-      </pc:sldChg>
-      <pc:sldChg chg="modSp add mod">
-        <pc:chgData name="Pablo Esteban Gutiérrez-Fonseca (he/him)" userId="25bdc618-995f-415b-9b28-31563f05eb38" providerId="ADAL" clId="{7D9C72EA-3835-4851-B556-7D2600718D23}" dt="2024-11-19T15:13:46.480" v="342" actId="20577"/>
-        <pc:sldMkLst>
-          <pc:docMk/>
-          <pc:sldMk cId="1726084656" sldId="349"/>
-        </pc:sldMkLst>
-      </pc:sldChg>
-      <pc:sldChg chg="del">
-        <pc:chgData name="Pablo Esteban Gutiérrez-Fonseca (he/him)" userId="25bdc618-995f-415b-9b28-31563f05eb38" providerId="ADAL" clId="{7D9C72EA-3835-4851-B556-7D2600718D23}" dt="2024-11-18T17:31:59.901" v="0" actId="47"/>
-        <pc:sldMkLst>
-          <pc:docMk/>
-          <pc:sldMk cId="0" sldId="353"/>
-        </pc:sldMkLst>
-      </pc:sldChg>
-      <pc:sldChg chg="del">
-        <pc:chgData name="Pablo Esteban Gutiérrez-Fonseca (he/him)" userId="25bdc618-995f-415b-9b28-31563f05eb38" providerId="ADAL" clId="{7D9C72EA-3835-4851-B556-7D2600718D23}" dt="2024-11-18T17:32:06.377" v="1" actId="47"/>
-        <pc:sldMkLst>
-          <pc:docMk/>
-          <pc:sldMk cId="0" sldId="358"/>
-        </pc:sldMkLst>
-      </pc:sldChg>
-      <pc:sldChg chg="del">
-        <pc:chgData name="Pablo Esteban Gutiérrez-Fonseca (he/him)" userId="25bdc618-995f-415b-9b28-31563f05eb38" providerId="ADAL" clId="{7D9C72EA-3835-4851-B556-7D2600718D23}" dt="2024-11-18T17:32:06.377" v="1" actId="47"/>
-        <pc:sldMkLst>
-          <pc:docMk/>
-          <pc:sldMk cId="3620885315" sldId="397"/>
-        </pc:sldMkLst>
-      </pc:sldChg>
-      <pc:sldChg chg="del">
-        <pc:chgData name="Pablo Esteban Gutiérrez-Fonseca (he/him)" userId="25bdc618-995f-415b-9b28-31563f05eb38" providerId="ADAL" clId="{7D9C72EA-3835-4851-B556-7D2600718D23}" dt="2024-11-18T17:31:59.901" v="0" actId="47"/>
-        <pc:sldMkLst>
-          <pc:docMk/>
-          <pc:sldMk cId="1995688423" sldId="424"/>
-        </pc:sldMkLst>
-      </pc:sldChg>
-      <pc:sldChg chg="del">
-        <pc:chgData name="Pablo Esteban Gutiérrez-Fonseca (he/him)" userId="25bdc618-995f-415b-9b28-31563f05eb38" providerId="ADAL" clId="{7D9C72EA-3835-4851-B556-7D2600718D23}" dt="2024-11-18T17:32:06.377" v="1" actId="47"/>
-        <pc:sldMkLst>
-          <pc:docMk/>
-          <pc:sldMk cId="203113774" sldId="425"/>
-        </pc:sldMkLst>
-      </pc:sldChg>
-      <pc:sldChg chg="del">
-        <pc:chgData name="Pablo Esteban Gutiérrez-Fonseca (he/him)" userId="25bdc618-995f-415b-9b28-31563f05eb38" providerId="ADAL" clId="{7D9C72EA-3835-4851-B556-7D2600718D23}" dt="2024-11-18T17:32:06.377" v="1" actId="47"/>
-        <pc:sldMkLst>
-          <pc:docMk/>
-          <pc:sldMk cId="31230415" sldId="426"/>
-        </pc:sldMkLst>
-      </pc:sldChg>
-      <pc:sldChg chg="del">
-        <pc:chgData name="Pablo Esteban Gutiérrez-Fonseca (he/him)" userId="25bdc618-995f-415b-9b28-31563f05eb38" providerId="ADAL" clId="{7D9C72EA-3835-4851-B556-7D2600718D23}" dt="2024-11-18T17:32:06.377" v="1" actId="47"/>
-        <pc:sldMkLst>
-          <pc:docMk/>
-          <pc:sldMk cId="3836665297" sldId="428"/>
-        </pc:sldMkLst>
-      </pc:sldChg>
-      <pc:sldChg chg="del">
-        <pc:chgData name="Pablo Esteban Gutiérrez-Fonseca (he/him)" userId="25bdc618-995f-415b-9b28-31563f05eb38" providerId="ADAL" clId="{7D9C72EA-3835-4851-B556-7D2600718D23}" dt="2024-11-18T17:31:59.901" v="0" actId="47"/>
-        <pc:sldMkLst>
-          <pc:docMk/>
-          <pc:sldMk cId="3252124337" sldId="429"/>
-        </pc:sldMkLst>
-      </pc:sldChg>
-      <pc:sldChg chg="del">
-        <pc:chgData name="Pablo Esteban Gutiérrez-Fonseca (he/him)" userId="25bdc618-995f-415b-9b28-31563f05eb38" providerId="ADAL" clId="{7D9C72EA-3835-4851-B556-7D2600718D23}" dt="2024-11-18T17:32:06.377" v="1" actId="47"/>
-        <pc:sldMkLst>
-          <pc:docMk/>
-          <pc:sldMk cId="551786521" sldId="430"/>
-        </pc:sldMkLst>
-      </pc:sldChg>
-      <pc:sldChg chg="del">
-        <pc:chgData name="Pablo Esteban Gutiérrez-Fonseca (he/him)" userId="25bdc618-995f-415b-9b28-31563f05eb38" providerId="ADAL" clId="{7D9C72EA-3835-4851-B556-7D2600718D23}" dt="2024-11-18T17:32:06.377" v="1" actId="47"/>
-        <pc:sldMkLst>
-          <pc:docMk/>
-          <pc:sldMk cId="3987978959" sldId="431"/>
-        </pc:sldMkLst>
-      </pc:sldChg>
-      <pc:sldChg chg="del">
-        <pc:chgData name="Pablo Esteban Gutiérrez-Fonseca (he/him)" userId="25bdc618-995f-415b-9b28-31563f05eb38" providerId="ADAL" clId="{7D9C72EA-3835-4851-B556-7D2600718D23}" dt="2024-11-18T17:32:06.377" v="1" actId="47"/>
-        <pc:sldMkLst>
-          <pc:docMk/>
-          <pc:sldMk cId="3604376669" sldId="432"/>
-        </pc:sldMkLst>
-      </pc:sldChg>
-      <pc:sldChg chg="del">
-        <pc:chgData name="Pablo Esteban Gutiérrez-Fonseca (he/him)" userId="25bdc618-995f-415b-9b28-31563f05eb38" providerId="ADAL" clId="{7D9C72EA-3835-4851-B556-7D2600718D23}" dt="2024-11-18T17:32:06.377" v="1" actId="47"/>
-        <pc:sldMkLst>
-          <pc:docMk/>
-          <pc:sldMk cId="3705508344" sldId="433"/>
-        </pc:sldMkLst>
-      </pc:sldChg>
-      <pc:sldChg chg="del">
-        <pc:chgData name="Pablo Esteban Gutiérrez-Fonseca (he/him)" userId="25bdc618-995f-415b-9b28-31563f05eb38" providerId="ADAL" clId="{7D9C72EA-3835-4851-B556-7D2600718D23}" dt="2024-11-18T17:32:06.377" v="1" actId="47"/>
-        <pc:sldMkLst>
-          <pc:docMk/>
-          <pc:sldMk cId="1966377490" sldId="434"/>
-        </pc:sldMkLst>
-      </pc:sldChg>
-      <pc:sldChg chg="del">
-        <pc:chgData name="Pablo Esteban Gutiérrez-Fonseca (he/him)" userId="25bdc618-995f-415b-9b28-31563f05eb38" providerId="ADAL" clId="{7D9C72EA-3835-4851-B556-7D2600718D23}" dt="2024-11-18T17:32:06.377" v="1" actId="47"/>
-        <pc:sldMkLst>
-          <pc:docMk/>
-          <pc:sldMk cId="848024198" sldId="435"/>
-        </pc:sldMkLst>
-      </pc:sldChg>
-      <pc:sldChg chg="del">
-        <pc:chgData name="Pablo Esteban Gutiérrez-Fonseca (he/him)" userId="25bdc618-995f-415b-9b28-31563f05eb38" providerId="ADAL" clId="{7D9C72EA-3835-4851-B556-7D2600718D23}" dt="2024-11-18T17:32:06.377" v="1" actId="47"/>
-        <pc:sldMkLst>
-          <pc:docMk/>
-          <pc:sldMk cId="377430983" sldId="436"/>
-        </pc:sldMkLst>
-      </pc:sldChg>
-      <pc:sldChg chg="del">
-        <pc:chgData name="Pablo Esteban Gutiérrez-Fonseca (he/him)" userId="25bdc618-995f-415b-9b28-31563f05eb38" providerId="ADAL" clId="{7D9C72EA-3835-4851-B556-7D2600718D23}" dt="2024-11-18T17:32:06.377" v="1" actId="47"/>
-        <pc:sldMkLst>
-          <pc:docMk/>
-          <pc:sldMk cId="3554232102" sldId="437"/>
-        </pc:sldMkLst>
-      </pc:sldChg>
-      <pc:sldChg chg="del">
-        <pc:chgData name="Pablo Esteban Gutiérrez-Fonseca (he/him)" userId="25bdc618-995f-415b-9b28-31563f05eb38" providerId="ADAL" clId="{7D9C72EA-3835-4851-B556-7D2600718D23}" dt="2024-11-18T17:32:06.377" v="1" actId="47"/>
-        <pc:sldMkLst>
-          <pc:docMk/>
-          <pc:sldMk cId="1529519286" sldId="438"/>
-        </pc:sldMkLst>
-      </pc:sldChg>
-      <pc:sldChg chg="del">
-        <pc:chgData name="Pablo Esteban Gutiérrez-Fonseca (he/him)" userId="25bdc618-995f-415b-9b28-31563f05eb38" providerId="ADAL" clId="{7D9C72EA-3835-4851-B556-7D2600718D23}" dt="2024-11-18T17:32:06.377" v="1" actId="47"/>
-        <pc:sldMkLst>
-          <pc:docMk/>
-          <pc:sldMk cId="1276764653" sldId="439"/>
-        </pc:sldMkLst>
-      </pc:sldChg>
-      <pc:sldChg chg="del">
-        <pc:chgData name="Pablo Esteban Gutiérrez-Fonseca (he/him)" userId="25bdc618-995f-415b-9b28-31563f05eb38" providerId="ADAL" clId="{7D9C72EA-3835-4851-B556-7D2600718D23}" dt="2024-11-18T17:32:06.377" v="1" actId="47"/>
-        <pc:sldMkLst>
-          <pc:docMk/>
-          <pc:sldMk cId="2710363587" sldId="440"/>
-        </pc:sldMkLst>
-      </pc:sldChg>
-      <pc:sldChg chg="del">
-        <pc:chgData name="Pablo Esteban Gutiérrez-Fonseca (he/him)" userId="25bdc618-995f-415b-9b28-31563f05eb38" providerId="ADAL" clId="{7D9C72EA-3835-4851-B556-7D2600718D23}" dt="2024-11-18T17:32:06.377" v="1" actId="47"/>
-        <pc:sldMkLst>
-          <pc:docMk/>
-          <pc:sldMk cId="3650460827" sldId="442"/>
-        </pc:sldMkLst>
-      </pc:sldChg>
-      <pc:sldChg chg="del">
-        <pc:chgData name="Pablo Esteban Gutiérrez-Fonseca (he/him)" userId="25bdc618-995f-415b-9b28-31563f05eb38" providerId="ADAL" clId="{7D9C72EA-3835-4851-B556-7D2600718D23}" dt="2024-11-18T17:32:06.377" v="1" actId="47"/>
-        <pc:sldMkLst>
-          <pc:docMk/>
-          <pc:sldMk cId="1442753479" sldId="443"/>
-        </pc:sldMkLst>
-      </pc:sldChg>
-      <pc:sldChg chg="del">
-        <pc:chgData name="Pablo Esteban Gutiérrez-Fonseca (he/him)" userId="25bdc618-995f-415b-9b28-31563f05eb38" providerId="ADAL" clId="{7D9C72EA-3835-4851-B556-7D2600718D23}" dt="2024-11-18T17:32:06.377" v="1" actId="47"/>
-        <pc:sldMkLst>
-          <pc:docMk/>
-          <pc:sldMk cId="4293684270" sldId="444"/>
-        </pc:sldMkLst>
-      </pc:sldChg>
-      <pc:sldChg chg="del">
-        <pc:chgData name="Pablo Esteban Gutiérrez-Fonseca (he/him)" userId="25bdc618-995f-415b-9b28-31563f05eb38" providerId="ADAL" clId="{7D9C72EA-3835-4851-B556-7D2600718D23}" dt="2024-11-18T17:32:06.377" v="1" actId="47"/>
-        <pc:sldMkLst>
-          <pc:docMk/>
-          <pc:sldMk cId="706335863" sldId="445"/>
-        </pc:sldMkLst>
-      </pc:sldChg>
-      <pc:sldChg chg="del">
-        <pc:chgData name="Pablo Esteban Gutiérrez-Fonseca (he/him)" userId="25bdc618-995f-415b-9b28-31563f05eb38" providerId="ADAL" clId="{7D9C72EA-3835-4851-B556-7D2600718D23}" dt="2024-11-18T17:32:06.377" v="1" actId="47"/>
-        <pc:sldMkLst>
-          <pc:docMk/>
-          <pc:sldMk cId="2456501208" sldId="447"/>
-        </pc:sldMkLst>
-      </pc:sldChg>
-      <pc:sldChg chg="del">
-        <pc:chgData name="Pablo Esteban Gutiérrez-Fonseca (he/him)" userId="25bdc618-995f-415b-9b28-31563f05eb38" providerId="ADAL" clId="{7D9C72EA-3835-4851-B556-7D2600718D23}" dt="2024-11-18T17:32:06.377" v="1" actId="47"/>
-        <pc:sldMkLst>
-          <pc:docMk/>
-          <pc:sldMk cId="433020280" sldId="448"/>
-        </pc:sldMkLst>
-      </pc:sldChg>
-      <pc:sldChg chg="del">
-        <pc:chgData name="Pablo Esteban Gutiérrez-Fonseca (he/him)" userId="25bdc618-995f-415b-9b28-31563f05eb38" providerId="ADAL" clId="{7D9C72EA-3835-4851-B556-7D2600718D23}" dt="2024-11-18T17:32:06.377" v="1" actId="47"/>
-        <pc:sldMkLst>
-          <pc:docMk/>
-          <pc:sldMk cId="1529699048" sldId="449"/>
-        </pc:sldMkLst>
-      </pc:sldChg>
-      <pc:sldChg chg="del">
-        <pc:chgData name="Pablo Esteban Gutiérrez-Fonseca (he/him)" userId="25bdc618-995f-415b-9b28-31563f05eb38" providerId="ADAL" clId="{7D9C72EA-3835-4851-B556-7D2600718D23}" dt="2024-11-18T17:32:06.377" v="1" actId="47"/>
-        <pc:sldMkLst>
-          <pc:docMk/>
-          <pc:sldMk cId="3028745146" sldId="450"/>
-        </pc:sldMkLst>
-      </pc:sldChg>
-      <pc:sldChg chg="del">
-        <pc:chgData name="Pablo Esteban Gutiérrez-Fonseca (he/him)" userId="25bdc618-995f-415b-9b28-31563f05eb38" providerId="ADAL" clId="{7D9C72EA-3835-4851-B556-7D2600718D23}" dt="2024-11-18T17:32:06.377" v="1" actId="47"/>
-        <pc:sldMkLst>
-          <pc:docMk/>
-          <pc:sldMk cId="3409393423" sldId="451"/>
-        </pc:sldMkLst>
-      </pc:sldChg>
-      <pc:sldChg chg="del">
-        <pc:chgData name="Pablo Esteban Gutiérrez-Fonseca (he/him)" userId="25bdc618-995f-415b-9b28-31563f05eb38" providerId="ADAL" clId="{7D9C72EA-3835-4851-B556-7D2600718D23}" dt="2024-11-18T17:32:06.377" v="1" actId="47"/>
-        <pc:sldMkLst>
-          <pc:docMk/>
-          <pc:sldMk cId="2044860063" sldId="452"/>
-        </pc:sldMkLst>
-      </pc:sldChg>
-      <pc:sldChg chg="del">
-        <pc:chgData name="Pablo Esteban Gutiérrez-Fonseca (he/him)" userId="25bdc618-995f-415b-9b28-31563f05eb38" providerId="ADAL" clId="{7D9C72EA-3835-4851-B556-7D2600718D23}" dt="2024-11-18T17:32:06.377" v="1" actId="47"/>
-        <pc:sldMkLst>
-          <pc:docMk/>
-          <pc:sldMk cId="1599736166" sldId="453"/>
-        </pc:sldMkLst>
-      </pc:sldChg>
-      <pc:sldChg chg="del">
-        <pc:chgData name="Pablo Esteban Gutiérrez-Fonseca (he/him)" userId="25bdc618-995f-415b-9b28-31563f05eb38" providerId="ADAL" clId="{7D9C72EA-3835-4851-B556-7D2600718D23}" dt="2024-11-18T17:32:06.377" v="1" actId="47"/>
-        <pc:sldMkLst>
-          <pc:docMk/>
-          <pc:sldMk cId="2651903870" sldId="454"/>
-        </pc:sldMkLst>
-      </pc:sldChg>
-      <pc:sldChg chg="del">
-        <pc:chgData name="Pablo Esteban Gutiérrez-Fonseca (he/him)" userId="25bdc618-995f-415b-9b28-31563f05eb38" providerId="ADAL" clId="{7D9C72EA-3835-4851-B556-7D2600718D23}" dt="2024-11-18T17:32:06.377" v="1" actId="47"/>
-        <pc:sldMkLst>
-          <pc:docMk/>
-          <pc:sldMk cId="3010514874" sldId="456"/>
-        </pc:sldMkLst>
-      </pc:sldChg>
-      <pc:sldChg chg="del">
-        <pc:chgData name="Pablo Esteban Gutiérrez-Fonseca (he/him)" userId="25bdc618-995f-415b-9b28-31563f05eb38" providerId="ADAL" clId="{7D9C72EA-3835-4851-B556-7D2600718D23}" dt="2024-11-18T17:32:06.377" v="1" actId="47"/>
-        <pc:sldMkLst>
-          <pc:docMk/>
-          <pc:sldMk cId="3854649333" sldId="457"/>
-        </pc:sldMkLst>
-      </pc:sldChg>
-      <pc:sldChg chg="del">
-        <pc:chgData name="Pablo Esteban Gutiérrez-Fonseca (he/him)" userId="25bdc618-995f-415b-9b28-31563f05eb38" providerId="ADAL" clId="{7D9C72EA-3835-4851-B556-7D2600718D23}" dt="2024-11-18T17:32:06.377" v="1" actId="47"/>
-        <pc:sldMkLst>
-          <pc:docMk/>
-          <pc:sldMk cId="3794688295" sldId="458"/>
-        </pc:sldMkLst>
-      </pc:sldChg>
-      <pc:sldChg chg="del">
-        <pc:chgData name="Pablo Esteban Gutiérrez-Fonseca (he/him)" userId="25bdc618-995f-415b-9b28-31563f05eb38" providerId="ADAL" clId="{7D9C72EA-3835-4851-B556-7D2600718D23}" dt="2024-11-18T17:32:06.377" v="1" actId="47"/>
-        <pc:sldMkLst>
-          <pc:docMk/>
-          <pc:sldMk cId="831549164" sldId="459"/>
-        </pc:sldMkLst>
-      </pc:sldChg>
-      <pc:sldChg chg="del">
-        <pc:chgData name="Pablo Esteban Gutiérrez-Fonseca (he/him)" userId="25bdc618-995f-415b-9b28-31563f05eb38" providerId="ADAL" clId="{7D9C72EA-3835-4851-B556-7D2600718D23}" dt="2024-11-18T17:32:06.377" v="1" actId="47"/>
-        <pc:sldMkLst>
-          <pc:docMk/>
-          <pc:sldMk cId="3026364795" sldId="460"/>
-        </pc:sldMkLst>
-      </pc:sldChg>
-      <pc:sldChg chg="del">
-        <pc:chgData name="Pablo Esteban Gutiérrez-Fonseca (he/him)" userId="25bdc618-995f-415b-9b28-31563f05eb38" providerId="ADAL" clId="{7D9C72EA-3835-4851-B556-7D2600718D23}" dt="2024-11-18T17:32:06.377" v="1" actId="47"/>
-        <pc:sldMkLst>
-          <pc:docMk/>
-          <pc:sldMk cId="2790315627" sldId="461"/>
-        </pc:sldMkLst>
-      </pc:sldChg>
-      <pc:sldChg chg="del">
-        <pc:chgData name="Pablo Esteban Gutiérrez-Fonseca (he/him)" userId="25bdc618-995f-415b-9b28-31563f05eb38" providerId="ADAL" clId="{7D9C72EA-3835-4851-B556-7D2600718D23}" dt="2024-11-18T17:32:06.377" v="1" actId="47"/>
-        <pc:sldMkLst>
-          <pc:docMk/>
-          <pc:sldMk cId="4283467524" sldId="462"/>
-        </pc:sldMkLst>
-      </pc:sldChg>
-      <pc:sldChg chg="del">
-        <pc:chgData name="Pablo Esteban Gutiérrez-Fonseca (he/him)" userId="25bdc618-995f-415b-9b28-31563f05eb38" providerId="ADAL" clId="{7D9C72EA-3835-4851-B556-7D2600718D23}" dt="2024-11-18T17:32:06.377" v="1" actId="47"/>
-        <pc:sldMkLst>
-          <pc:docMk/>
-          <pc:sldMk cId="2865823119" sldId="463"/>
-        </pc:sldMkLst>
-      </pc:sldChg>
-      <pc:sldChg chg="del">
-        <pc:chgData name="Pablo Esteban Gutiérrez-Fonseca (he/him)" userId="25bdc618-995f-415b-9b28-31563f05eb38" providerId="ADAL" clId="{7D9C72EA-3835-4851-B556-7D2600718D23}" dt="2024-11-18T17:32:06.377" v="1" actId="47"/>
-        <pc:sldMkLst>
-          <pc:docMk/>
-          <pc:sldMk cId="1105824289" sldId="464"/>
-        </pc:sldMkLst>
-      </pc:sldChg>
-      <pc:sldChg chg="del">
-        <pc:chgData name="Pablo Esteban Gutiérrez-Fonseca (he/him)" userId="25bdc618-995f-415b-9b28-31563f05eb38" providerId="ADAL" clId="{7D9C72EA-3835-4851-B556-7D2600718D23}" dt="2024-11-18T17:32:06.377" v="1" actId="47"/>
-        <pc:sldMkLst>
-          <pc:docMk/>
-          <pc:sldMk cId="3387775123" sldId="465"/>
-        </pc:sldMkLst>
-      </pc:sldChg>
-      <pc:sldChg chg="del">
-        <pc:chgData name="Pablo Esteban Gutiérrez-Fonseca (he/him)" userId="25bdc618-995f-415b-9b28-31563f05eb38" providerId="ADAL" clId="{7D9C72EA-3835-4851-B556-7D2600718D23}" dt="2024-11-18T17:32:06.377" v="1" actId="47"/>
-        <pc:sldMkLst>
-          <pc:docMk/>
-          <pc:sldMk cId="3963161799" sldId="466"/>
-        </pc:sldMkLst>
-      </pc:sldChg>
-      <pc:sldChg chg="del">
-        <pc:chgData name="Pablo Esteban Gutiérrez-Fonseca (he/him)" userId="25bdc618-995f-415b-9b28-31563f05eb38" providerId="ADAL" clId="{7D9C72EA-3835-4851-B556-7D2600718D23}" dt="2024-11-18T17:32:06.377" v="1" actId="47"/>
-        <pc:sldMkLst>
-          <pc:docMk/>
-          <pc:sldMk cId="1477401131" sldId="467"/>
-        </pc:sldMkLst>
-      </pc:sldChg>
-      <pc:sldChg chg="del">
-        <pc:chgData name="Pablo Esteban Gutiérrez-Fonseca (he/him)" userId="25bdc618-995f-415b-9b28-31563f05eb38" providerId="ADAL" clId="{7D9C72EA-3835-4851-B556-7D2600718D23}" dt="2024-11-18T17:32:06.377" v="1" actId="47"/>
-        <pc:sldMkLst>
-          <pc:docMk/>
-          <pc:sldMk cId="4086430647" sldId="468"/>
-        </pc:sldMkLst>
-      </pc:sldChg>
-      <pc:sldChg chg="del">
-        <pc:chgData name="Pablo Esteban Gutiérrez-Fonseca (he/him)" userId="25bdc618-995f-415b-9b28-31563f05eb38" providerId="ADAL" clId="{7D9C72EA-3835-4851-B556-7D2600718D23}" dt="2024-11-18T17:32:06.377" v="1" actId="47"/>
-        <pc:sldMkLst>
-          <pc:docMk/>
-          <pc:sldMk cId="1646979674" sldId="469"/>
-        </pc:sldMkLst>
-      </pc:sldChg>
-      <pc:sldChg chg="del">
-        <pc:chgData name="Pablo Esteban Gutiérrez-Fonseca (he/him)" userId="25bdc618-995f-415b-9b28-31563f05eb38" providerId="ADAL" clId="{7D9C72EA-3835-4851-B556-7D2600718D23}" dt="2024-11-18T17:32:06.377" v="1" actId="47"/>
-        <pc:sldMkLst>
-          <pc:docMk/>
-          <pc:sldMk cId="2399413619" sldId="470"/>
-        </pc:sldMkLst>
-      </pc:sldChg>
-      <pc:sldChg chg="del">
-        <pc:chgData name="Pablo Esteban Gutiérrez-Fonseca (he/him)" userId="25bdc618-995f-415b-9b28-31563f05eb38" providerId="ADAL" clId="{7D9C72EA-3835-4851-B556-7D2600718D23}" dt="2024-11-18T17:32:06.377" v="1" actId="47"/>
-        <pc:sldMkLst>
-          <pc:docMk/>
-          <pc:sldMk cId="3713444159" sldId="471"/>
-        </pc:sldMkLst>
-      </pc:sldChg>
-      <pc:sldChg chg="del">
-        <pc:chgData name="Pablo Esteban Gutiérrez-Fonseca (he/him)" userId="25bdc618-995f-415b-9b28-31563f05eb38" providerId="ADAL" clId="{7D9C72EA-3835-4851-B556-7D2600718D23}" dt="2024-11-18T17:32:06.377" v="1" actId="47"/>
-        <pc:sldMkLst>
-          <pc:docMk/>
-          <pc:sldMk cId="2764097611" sldId="472"/>
-        </pc:sldMkLst>
-      </pc:sldChg>
-      <pc:sldChg chg="del">
-        <pc:chgData name="Pablo Esteban Gutiérrez-Fonseca (he/him)" userId="25bdc618-995f-415b-9b28-31563f05eb38" providerId="ADAL" clId="{7D9C72EA-3835-4851-B556-7D2600718D23}" dt="2024-11-18T17:32:06.377" v="1" actId="47"/>
-        <pc:sldMkLst>
-          <pc:docMk/>
-          <pc:sldMk cId="312242398" sldId="473"/>
-        </pc:sldMkLst>
-      </pc:sldChg>
-      <pc:sldChg chg="del">
-        <pc:chgData name="Pablo Esteban Gutiérrez-Fonseca (he/him)" userId="25bdc618-995f-415b-9b28-31563f05eb38" providerId="ADAL" clId="{7D9C72EA-3835-4851-B556-7D2600718D23}" dt="2024-11-18T17:32:06.377" v="1" actId="47"/>
-        <pc:sldMkLst>
-          <pc:docMk/>
-          <pc:sldMk cId="4187936776" sldId="474"/>
-        </pc:sldMkLst>
-      </pc:sldChg>
-      <pc:sldChg chg="del">
-        <pc:chgData name="Pablo Esteban Gutiérrez-Fonseca (he/him)" userId="25bdc618-995f-415b-9b28-31563f05eb38" providerId="ADAL" clId="{7D9C72EA-3835-4851-B556-7D2600718D23}" dt="2024-11-18T17:32:06.377" v="1" actId="47"/>
-        <pc:sldMkLst>
-          <pc:docMk/>
-          <pc:sldMk cId="274915159" sldId="475"/>
-        </pc:sldMkLst>
-      </pc:sldChg>
-      <pc:sldChg chg="del">
-        <pc:chgData name="Pablo Esteban Gutiérrez-Fonseca (he/him)" userId="25bdc618-995f-415b-9b28-31563f05eb38" providerId="ADAL" clId="{7D9C72EA-3835-4851-B556-7D2600718D23}" dt="2024-11-18T17:32:06.377" v="1" actId="47"/>
-        <pc:sldMkLst>
-          <pc:docMk/>
-          <pc:sldMk cId="2192977316" sldId="476"/>
-        </pc:sldMkLst>
-      </pc:sldChg>
-      <pc:sldChg chg="del">
-        <pc:chgData name="Pablo Esteban Gutiérrez-Fonseca (he/him)" userId="25bdc618-995f-415b-9b28-31563f05eb38" providerId="ADAL" clId="{7D9C72EA-3835-4851-B556-7D2600718D23}" dt="2024-11-18T17:32:06.377" v="1" actId="47"/>
-        <pc:sldMkLst>
-          <pc:docMk/>
-          <pc:sldMk cId="3298240729" sldId="477"/>
-        </pc:sldMkLst>
-      </pc:sldChg>
-      <pc:sldChg chg="del">
-        <pc:chgData name="Pablo Esteban Gutiérrez-Fonseca (he/him)" userId="25bdc618-995f-415b-9b28-31563f05eb38" providerId="ADAL" clId="{7D9C72EA-3835-4851-B556-7D2600718D23}" dt="2024-11-18T17:32:06.377" v="1" actId="47"/>
-        <pc:sldMkLst>
-          <pc:docMk/>
-          <pc:sldMk cId="4068662439" sldId="478"/>
-        </pc:sldMkLst>
-      </pc:sldChg>
-      <pc:sldChg chg="del">
-        <pc:chgData name="Pablo Esteban Gutiérrez-Fonseca (he/him)" userId="25bdc618-995f-415b-9b28-31563f05eb38" providerId="ADAL" clId="{7D9C72EA-3835-4851-B556-7D2600718D23}" dt="2024-11-18T17:32:06.377" v="1" actId="47"/>
-        <pc:sldMkLst>
-          <pc:docMk/>
-          <pc:sldMk cId="1947247746" sldId="479"/>
-        </pc:sldMkLst>
-      </pc:sldChg>
-    </pc:docChg>
-  </pc:docChgLst>
 </pc:chgInfo>
 </file>
 
@@ -2365,7 +2396,7 @@
               <a:pPr>
                 <a:defRPr/>
               </a:pPr>
-              <a:t>Tuesday, April 15, 2025</a:t>
+              <a:t>Wednesday, April 16, 2025</a:t>
             </a:fld>
             <a:endParaRPr lang="en-US"/>
           </a:p>
@@ -2556,7 +2587,7 @@
               <a:pPr>
                 <a:defRPr/>
               </a:pPr>
-              <a:t>Tuesday, April 15, 2025</a:t>
+              <a:t>Wednesday, April 16, 2025</a:t>
             </a:fld>
             <a:endParaRPr lang="en-US"/>
           </a:p>
@@ -5552,7 +5583,7 @@
                   <a:spcPts val="0"/>
                 </a:spcAft>
               </a:pPr>
-              <a:t>Tuesday, April 15, 2025</a:t>
+              <a:t>Wednesday, April 16, 2025</a:t>
             </a:fld>
             <a:endParaRPr lang="en-US" dirty="0">
               <a:solidFill>
@@ -6198,6 +6229,12 @@
               <a:t>The r-squared value quantifies the proportion of the variance in the dependent variable that is predictable from the independent variables.</a:t>
             </a:r>
           </a:p>
+          <a:p>
+            <a:endParaRPr lang="en-US" dirty="0">
+              <a:latin typeface="Times New Roman" panose="02020603050405020304" pitchFamily="18" charset="0"/>
+              <a:cs typeface="Times New Roman" panose="02020603050405020304" pitchFamily="18" charset="0"/>
+            </a:endParaRPr>
+          </a:p>
         </p:txBody>
       </p:sp>
     </p:spTree>
@@ -9909,7 +9946,7 @@
 </file>
 
 <file path=ppt/slides/slide5.xml><?xml version="1.0" encoding="utf-8"?>
-<p:sld xmlns:a="http://schemas.openxmlformats.org/drawingml/2006/main" xmlns:r="http://schemas.openxmlformats.org/officeDocument/2006/relationships" xmlns:p="http://schemas.openxmlformats.org/presentationml/2006/main">
+<p:sld xmlns:a="http://schemas.openxmlformats.org/drawingml/2006/main" xmlns:r="http://schemas.openxmlformats.org/officeDocument/2006/relationships" xmlns:p="http://schemas.openxmlformats.org/presentationml/2006/main" show="0">
   <p:cSld>
     <p:spTree>
       <p:nvGrpSpPr>
